--- a/MECH191_metallurgy/slideDecks/pptx/MECH191_Week15_Lecture.pptx
+++ b/MECH191_metallurgy/slideDecks/pptx/MECH191_Week15_Lecture.pptx
@@ -14428,7 +14428,7 @@
         </p:spPr>
         <p:txBody>
           <a:bodyPr wrap="none" lIns="0" rIns="0" tIns="0" bIns="0">
-            <a:spAutoFit/>
+            <a:noAutofit/>
           </a:bodyPr>
           <a:lstStyle/>
           <a:p>
@@ -14439,7 +14439,7 @@
                 </a:solidFill>
                 <a:latin typeface="Calibri"/>
               </a:rPr>
-              <a:t>Metallography Lab — Module 14</a:t>
+              <a:t>Alloy Research Portfolio — Module 14</a:t>
             </a:r>
           </a:p>
         </p:txBody>
@@ -14462,7 +14462,7 @@
         </p:spPr>
         <p:txBody>
           <a:bodyPr wrap="none" lIns="0" rIns="0" tIns="0" bIns="0">
-            <a:spAutoFit/>
+            <a:noAutofit/>
           </a:bodyPr>
           <a:lstStyle/>
           <a:p>
@@ -14473,7 +14473,7 @@
                 </a:solidFill>
                 <a:latin typeface="Calibri"/>
               </a:rPr>
-              <a:t>EXAMET-5-R-600-HD  ·  50–500×</a:t>
+              <a:t>No Microscope Required</a:t>
             </a:r>
           </a:p>
         </p:txBody>
@@ -14598,7 +14598,7 @@
         </p:spPr>
         <p:txBody>
           <a:bodyPr wrap="none" lIns="0" rIns="0" tIns="0" bIns="0">
-            <a:spAutoFit/>
+            <a:noAutofit/>
           </a:bodyPr>
           <a:lstStyle/>
           <a:p>
@@ -14609,7 +14609,7 @@
                 </a:solidFill>
                 <a:latin typeface="Calibri"/>
               </a:rPr>
-              <a:t>Revisit F, J, and O to compare precipitate size and density across steel, </a:t>
+              <a:t>Research HV for 17-4PH stainless, then pull your logged 2024-T3 and</a:t>
             </a:r>
           </a:p>
         </p:txBody>
@@ -14632,7 +14632,7 @@
         </p:spPr>
         <p:txBody>
           <a:bodyPr wrap="none" lIns="0" rIns="0" tIns="0" bIns="0">
-            <a:spAutoFit/>
+            <a:noAutofit/>
           </a:bodyPr>
           <a:lstStyle/>
           <a:p>
@@ -14643,7 +14643,7 @@
                 </a:solidFill>
                 <a:latin typeface="Calibri"/>
               </a:rPr>
-              <a:t>aluminum, and copper. This week's lab no longer uses weld/fracture </a:t>
+              <a:t>chromium-copper values to compare precipitation hardening across</a:t>
             </a:r>
           </a:p>
         </p:txBody>
@@ -14666,7 +14666,7 @@
         </p:spPr>
         <p:txBody>
           <a:bodyPr wrap="none" lIns="0" rIns="0" tIns="0" bIns="0">
-            <a:spAutoFit/>
+            <a:noAutofit/>
           </a:bodyPr>
           <a:lstStyle/>
           <a:p>
@@ -14677,7 +14677,7 @@
                 </a:solidFill>
                 <a:latin typeface="Calibri"/>
               </a:rPr>
-              <a:t>specimens — that content remains in today's lecture.</a:t>
+              <a:t>three base metals — steel, aluminum, and copper.</a:t>
             </a:r>
           </a:p>
         </p:txBody>
@@ -14734,7 +14734,7 @@
         </p:spPr>
         <p:txBody>
           <a:bodyPr wrap="none" lIns="0" rIns="0" tIns="0" bIns="0">
-            <a:spAutoFit/>
+            <a:noAutofit/>
           </a:bodyPr>
           <a:lstStyle/>
           <a:p>
@@ -14745,7 +14745,7 @@
                 </a:solidFill>
                 <a:latin typeface="Calibri"/>
               </a:rPr>
-              <a:t>1  Observe — complete feature table</a:t>
+              <a:t>1  Research — record data &amp; sources</a:t>
             </a:r>
           </a:p>
         </p:txBody>
@@ -14768,7 +14768,7 @@
         </p:spPr>
         <p:txBody>
           <a:bodyPr wrap="none" lIns="0" rIns="0" tIns="0" bIns="0">
-            <a:spAutoFit/>
+            <a:noAutofit/>
           </a:bodyPr>
           <a:lstStyle/>
           <a:p>
@@ -14779,7 +14779,7 @@
                 </a:solidFill>
                 <a:latin typeface="Calibri"/>
               </a:rPr>
-              <a:t>2  Sketch — label magnification &amp; specimen</a:t>
+              <a:t>2  Answer — short-answer questions</a:t>
             </a:r>
           </a:p>
         </p:txBody>
@@ -14802,7 +14802,7 @@
         </p:spPr>
         <p:txBody>
           <a:bodyPr wrap="none" lIns="0" rIns="0" tIns="0" bIns="0">
-            <a:spAutoFit/>
+            <a:noAutofit/>
           </a:bodyPr>
           <a:lstStyle/>
           <a:p>
@@ -14813,7 +14813,7 @@
                 </a:solidFill>
                 <a:latin typeface="Calibri"/>
               </a:rPr>
-              <a:t>3  Answer — 4 short questions</a:t>
+              <a:t>3  Apply — critical-thinking &amp; equations</a:t>
             </a:r>
           </a:p>
         </p:txBody>
@@ -14847,7 +14847,7 @@
                 </a:solidFill>
                 <a:latin typeface="Calibri"/>
               </a:rPr>
-              <a:t>Specimens to Check Out</a:t>
+              <a:t>Alloys of Record</a:t>
             </a:r>
           </a:p>
         </p:txBody>
@@ -14881,7 +14881,7 @@
                 </a:solidFill>
                 <a:latin typeface="Calibri"/>
               </a:rPr>
-              <a:t>· Specimen F — 17-4PH (revisit, Module 4)</a:t>
+              <a:t>· Alloy F — 17-4PH stainless (revisit)</a:t>
             </a:r>
           </a:p>
         </p:txBody>
@@ -14915,7 +14915,7 @@
                 </a:solidFill>
                 <a:latin typeface="Calibri"/>
               </a:rPr>
-              <a:t>· Specimens J, O — 2024-T3 &amp; chromium copper (revisit)</a:t>
+              <a:t>· Alloys J, O — 2024-T3 Al &amp; chromium copper (revisit)</a:t>
             </a:r>
           </a:p>
         </p:txBody>
@@ -14938,7 +14938,7 @@
         </p:spPr>
         <p:txBody>
           <a:bodyPr wrap="none" lIns="0" rIns="0" tIns="0" bIns="0">
-            <a:spAutoFit/>
+            <a:noAutofit/>
           </a:bodyPr>
           <a:lstStyle/>
           <a:p>
@@ -14949,7 +14949,7 @@
                 </a:solidFill>
                 <a:latin typeface="Calibri"/>
               </a:rPr>
-              <a:t>How to check out the kit:</a:t>
+              <a:t>How to Complete This Module:</a:t>
             </a:r>
           </a:p>
         </p:txBody>
@@ -14972,7 +14972,7 @@
         </p:spPr>
         <p:txBody>
           <a:bodyPr wrap="none" lIns="0" rIns="0" tIns="0" bIns="0">
-            <a:spAutoFit/>
+            <a:noAutofit/>
           </a:bodyPr>
           <a:lstStyle/>
           <a:p>
@@ -14983,7 +14983,7 @@
                 </a:solidFill>
                 <a:latin typeface="Calibri"/>
               </a:rPr>
-              <a:t>1  See instructor after class today</a:t>
+              <a:t>1  Research the alloy(s) using credible sources</a:t>
             </a:r>
           </a:p>
         </p:txBody>
@@ -15006,7 +15006,7 @@
         </p:spPr>
         <p:txBody>
           <a:bodyPr wrap="none" lIns="0" rIns="0" tIns="0" bIns="0">
-            <a:spAutoFit/>
+            <a:noAutofit/>
           </a:bodyPr>
           <a:lstStyle/>
           <a:p>
@@ -15017,7 +15017,7 @@
                 </a:solidFill>
                 <a:latin typeface="Calibri"/>
               </a:rPr>
-              <a:t>2  Sign out the specimen tray</a:t>
+              <a:t>2  Record data with a source citation</a:t>
             </a:r>
           </a:p>
         </p:txBody>
@@ -15040,7 +15040,7 @@
         </p:spPr>
         <p:txBody>
           <a:bodyPr wrap="none" lIns="0" rIns="0" tIns="0" bIns="0">
-            <a:spAutoFit/>
+            <a:noAutofit/>
           </a:bodyPr>
           <a:lstStyle/>
           <a:p>
@@ -15051,7 +15051,7 @@
                 </a:solidFill>
                 <a:latin typeface="Calibri"/>
               </a:rPr>
-              <a:t>3  Use the EXAMET-5 at your convenience</a:t>
+              <a:t>3  Answer the short-answer questions</a:t>
             </a:r>
           </a:p>
         </p:txBody>
@@ -15074,7 +15074,7 @@
         </p:spPr>
         <p:txBody>
           <a:bodyPr wrap="none" lIns="0" rIns="0" tIns="0" bIns="0">
-            <a:spAutoFit/>
+            <a:noAutofit/>
           </a:bodyPr>
           <a:lstStyle/>
           <a:p>
@@ -15085,7 +15085,7 @@
                 </a:solidFill>
                 <a:latin typeface="Calibri"/>
               </a:rPr>
-              <a:t>4  Return kit before leaving class</a:t>
+              <a:t>4  Answer the critical-thinking questions</a:t>
             </a:r>
           </a:p>
         </p:txBody>
@@ -15108,7 +15108,7 @@
         </p:spPr>
         <p:txBody>
           <a:bodyPr wrap="none" lIns="0" rIns="0" tIns="0" bIns="0">
-            <a:spAutoFit/>
+            <a:noAutofit/>
           </a:bodyPr>
           <a:lstStyle/>
           <a:p>
@@ -15119,7 +15119,7 @@
                 </a:solidFill>
                 <a:latin typeface="Calibri"/>
               </a:rPr>
-              <a:t>5  Submit completed module with your portfolio</a:t>
+              <a:t>5  Keep the module with your portfolio</a:t>
             </a:r>
           </a:p>
         </p:txBody>
